--- a/Chapter 11_Generative Deep Learning.pptx
+++ b/Chapter 11_Generative Deep Learning.pptx
@@ -5,14 +5,15 @@
     <p:sldMasterId id="2147483660" r:id="rId1"/>
   </p:sldMasterIdLst>
   <p:notesMasterIdLst>
-    <p:notesMasterId r:id="rId4"/>
+    <p:notesMasterId r:id="rId5"/>
   </p:notesMasterIdLst>
   <p:handoutMasterIdLst>
-    <p:handoutMasterId r:id="rId5"/>
+    <p:handoutMasterId r:id="rId6"/>
   </p:handoutMasterIdLst>
   <p:sldIdLst>
     <p:sldId id="256" r:id="rId2"/>
     <p:sldId id="1168" r:id="rId3"/>
+    <p:sldId id="1169" r:id="rId4"/>
   </p:sldIdLst>
   <p:sldSz cx="12192000" cy="6858000"/>
   <p:notesSz cx="6858000" cy="9144000"/>
@@ -122,6 +123,7 @@
         <p14:section name="디자인, 모핑, 주석 달기, 공동 작업, 입력하세요" id="{B9B51309-D148-4332-87C2-07BE32FBCA3B}">
           <p14:sldIdLst>
             <p14:sldId id="1168"/>
+            <p14:sldId id="1169"/>
           </p14:sldIdLst>
         </p14:section>
         <p14:section name="자세한 정보" id="{2CC34DB2-6590-42C0-AD4B-A04C6060184E}">
@@ -3118,7 +3120,7 @@
         </p:nvSpPr>
         <p:spPr>
           <a:xfrm>
-            <a:off x="660400" y="1981200"/>
+            <a:off x="601276" y="1788850"/>
             <a:ext cx="5570756" cy="1853264"/>
           </a:xfrm>
           <a:prstGeom prst="rect">
@@ -3194,6 +3196,217 @@
     <p:extLst>
       <p:ext uri="{BB962C8B-B14F-4D97-AF65-F5344CB8AC3E}">
         <p14:creationId xmlns:p14="http://schemas.microsoft.com/office/powerpoint/2010/main" val="1175445255"/>
+      </p:ext>
+    </p:extLst>
+  </p:cSld>
+  <p:clrMapOvr>
+    <a:masterClrMapping/>
+  </p:clrMapOvr>
+</p:sld>
+</file>
+
+<file path=ppt/slides/slide3.xml><?xml version="1.0" encoding="utf-8"?>
+<p:sld xmlns:a="http://schemas.openxmlformats.org/drawingml/2006/main" xmlns:r="http://schemas.openxmlformats.org/officeDocument/2006/relationships" xmlns:p="http://schemas.openxmlformats.org/presentationml/2006/main">
+  <p:cSld>
+    <p:spTree>
+      <p:nvGrpSpPr>
+        <p:cNvPr id="1" name="">
+          <a:extLst>
+            <a:ext uri="{FF2B5EF4-FFF2-40B4-BE49-F238E27FC236}">
+              <a16:creationId xmlns:a16="http://schemas.microsoft.com/office/drawing/2014/main" id="{73B97F8C-CE85-CE8E-5C47-2CD654831D06}"/>
+            </a:ext>
+          </a:extLst>
+        </p:cNvPr>
+        <p:cNvGrpSpPr/>
+        <p:nvPr/>
+      </p:nvGrpSpPr>
+      <p:grpSpPr>
+        <a:xfrm>
+          <a:off x="0" y="0"/>
+          <a:ext cx="0" cy="0"/>
+          <a:chOff x="0" y="0"/>
+          <a:chExt cx="0" cy="0"/>
+        </a:xfrm>
+      </p:grpSpPr>
+      <p:sp>
+        <p:nvSpPr>
+          <p:cNvPr id="3" name="제목 1">
+            <a:extLst>
+              <a:ext uri="{FF2B5EF4-FFF2-40B4-BE49-F238E27FC236}">
+                <a16:creationId xmlns:a16="http://schemas.microsoft.com/office/drawing/2014/main" id="{0BB9FD80-8815-B1DE-256D-4FE272770C74}"/>
+              </a:ext>
+            </a:extLst>
+          </p:cNvPr>
+          <p:cNvSpPr txBox="1">
+            <a:spLocks/>
+          </p:cNvSpPr>
+          <p:nvPr/>
+        </p:nvSpPr>
+        <p:spPr>
+          <a:xfrm>
+            <a:off x="475645" y="481983"/>
+            <a:ext cx="10353762" cy="766439"/>
+          </a:xfrm>
+          <a:prstGeom prst="rect">
+            <a:avLst/>
+          </a:prstGeom>
+        </p:spPr>
+        <p:txBody>
+          <a:bodyPr vert="horz" lIns="91440" tIns="45720" rIns="91440" bIns="45720" rtlCol="0" anchor="ctr">
+            <a:normAutofit/>
+          </a:bodyPr>
+          <a:lstStyle>
+            <a:lvl1pPr algn="ctr" defTabSz="914400" rtl="0" eaLnBrk="1" latinLnBrk="1" hangingPunct="1">
+              <a:lnSpc>
+                <a:spcPct val="90000"/>
+              </a:lnSpc>
+              <a:spcBef>
+                <a:spcPct val="0"/>
+              </a:spcBef>
+              <a:buNone/>
+              <a:defRPr sz="3200" kern="1200" cap="all" baseline="0">
+                <a:solidFill>
+                  <a:schemeClr val="tx1"/>
+                </a:solidFill>
+                <a:effectLst/>
+                <a:latin typeface="Batang" panose="02030600000101010101" pitchFamily="18" charset="-127"/>
+                <a:ea typeface="Batang" panose="02030600000101010101" pitchFamily="18" charset="-127"/>
+                <a:cs typeface="+mj-cs"/>
+              </a:defRPr>
+            </a:lvl1pPr>
+          </a:lstStyle>
+          <a:p>
+            <a:pPr algn="l"/>
+            <a:r>
+              <a:rPr lang="en-US" altLang="ko-KR" b="1" cap="none" dirty="0"/>
+              <a:t>Goals</a:t>
+            </a:r>
+          </a:p>
+        </p:txBody>
+      </p:sp>
+      <p:pic>
+        <p:nvPicPr>
+          <p:cNvPr id="7" name="그림 6">
+            <a:extLst>
+              <a:ext uri="{FF2B5EF4-FFF2-40B4-BE49-F238E27FC236}">
+                <a16:creationId xmlns:a16="http://schemas.microsoft.com/office/drawing/2014/main" id="{9FE97CC7-95F7-7476-C50C-61C11EBB95FD}"/>
+              </a:ext>
+            </a:extLst>
+          </p:cNvPr>
+          <p:cNvPicPr>
+            <a:picLocks noChangeAspect="1"/>
+          </p:cNvPicPr>
+          <p:nvPr/>
+        </p:nvPicPr>
+        <p:blipFill>
+          <a:blip r:embed="rId2"/>
+          <a:stretch>
+            <a:fillRect/>
+          </a:stretch>
+        </p:blipFill>
+        <p:spPr>
+          <a:xfrm>
+            <a:off x="5652526" y="1802669"/>
+            <a:ext cx="5532553" cy="3424111"/>
+          </a:xfrm>
+          <a:prstGeom prst="rect">
+            <a:avLst/>
+          </a:prstGeom>
+        </p:spPr>
+      </p:pic>
+      <p:pic>
+        <p:nvPicPr>
+          <p:cNvPr id="5" name="그림 4">
+            <a:extLst>
+              <a:ext uri="{FF2B5EF4-FFF2-40B4-BE49-F238E27FC236}">
+                <a16:creationId xmlns:a16="http://schemas.microsoft.com/office/drawing/2014/main" id="{51911950-891B-7F2F-B254-7B38EB430036}"/>
+              </a:ext>
+            </a:extLst>
+          </p:cNvPr>
+          <p:cNvPicPr>
+            <a:picLocks noChangeAspect="1"/>
+          </p:cNvPicPr>
+          <p:nvPr/>
+        </p:nvPicPr>
+        <p:blipFill>
+          <a:blip r:embed="rId3"/>
+          <a:stretch>
+            <a:fillRect/>
+          </a:stretch>
+        </p:blipFill>
+        <p:spPr>
+          <a:xfrm>
+            <a:off x="3687510" y="4209473"/>
+            <a:ext cx="4218240" cy="2322344"/>
+          </a:xfrm>
+          <a:prstGeom prst="rect">
+            <a:avLst/>
+          </a:prstGeom>
+        </p:spPr>
+      </p:pic>
+      <p:sp>
+        <p:nvSpPr>
+          <p:cNvPr id="8" name="TextBox 7">
+            <a:extLst>
+              <a:ext uri="{FF2B5EF4-FFF2-40B4-BE49-F238E27FC236}">
+                <a16:creationId xmlns:a16="http://schemas.microsoft.com/office/drawing/2014/main" id="{0ADB9A87-CAC6-1403-7A6A-24E95A02B319}"/>
+              </a:ext>
+            </a:extLst>
+          </p:cNvPr>
+          <p:cNvSpPr txBox="1"/>
+          <p:nvPr/>
+        </p:nvSpPr>
+        <p:spPr>
+          <a:xfrm>
+            <a:off x="475645" y="1298017"/>
+            <a:ext cx="5840060" cy="369332"/>
+          </a:xfrm>
+          <a:prstGeom prst="rect">
+            <a:avLst/>
+          </a:prstGeom>
+          <a:noFill/>
+        </p:spPr>
+        <p:txBody>
+          <a:bodyPr wrap="none" rtlCol="0">
+            <a:spAutoFit/>
+          </a:bodyPr>
+          <a:lstStyle/>
+          <a:p>
+            <a:r>
+              <a:rPr lang="en-US" altLang="ko-KR" dirty="0">
+                <a:latin typeface="D2Coding" panose="020B0609020101020101" pitchFamily="49" charset="-127"/>
+                <a:ea typeface="D2Coding" panose="020B0609020101020101" pitchFamily="49" charset="-127"/>
+              </a:rPr>
+              <a:t>Deep Learning with Python</a:t>
+            </a:r>
+            <a:r>
+              <a:rPr lang="ko-KR" altLang="en-US" dirty="0">
+                <a:latin typeface="D2Coding" panose="020B0609020101020101" pitchFamily="49" charset="-127"/>
+                <a:ea typeface="D2Coding" panose="020B0609020101020101" pitchFamily="49" charset="-127"/>
+              </a:rPr>
+              <a:t>의 </a:t>
+            </a:r>
+            <a:r>
+              <a:rPr lang="en-US" altLang="ko-KR" dirty="0">
+                <a:latin typeface="D2Coding" panose="020B0609020101020101" pitchFamily="49" charset="-127"/>
+                <a:ea typeface="D2Coding" panose="020B0609020101020101" pitchFamily="49" charset="-127"/>
+              </a:rPr>
+              <a:t>chapter 16, 17</a:t>
+            </a:r>
+            <a:r>
+              <a:rPr lang="ko-KR" altLang="en-US" dirty="0">
+                <a:latin typeface="D2Coding" panose="020B0609020101020101" pitchFamily="49" charset="-127"/>
+                <a:ea typeface="D2Coding" panose="020B0609020101020101" pitchFamily="49" charset="-127"/>
+              </a:rPr>
+              <a:t>장 대체</a:t>
+            </a:r>
+          </a:p>
+        </p:txBody>
+      </p:sp>
+    </p:spTree>
+    <p:extLst>
+      <p:ext uri="{BB962C8B-B14F-4D97-AF65-F5344CB8AC3E}">
+        <p14:creationId xmlns:p14="http://schemas.microsoft.com/office/powerpoint/2010/main" val="647526722"/>
       </p:ext>
     </p:extLst>
   </p:cSld>
